--- a/prezentatsii/kosmopolitizm/kosmopolitizm.pptx
+++ b/prezentatsii/kosmopolitizm/kosmopolitizm.pptx
@@ -3461,41 +3461,40 @@
           </a:p>
         </p:txBody>
       </p:sp>
-      <p:sp>
-        <p:nvSpPr>
-          <p:cNvPr id="5" name="Shape 3"/>
+      <p:pic>
+        <p:nvPicPr>
+          <p:cNvPr id="5" name="Image 0" descr="/home/user/danok12/prezentatsii/kosmopolitizm/src/img/earth.jpg">    </p:cNvPr>
+          <p:cNvPicPr>
+            <a:picLocks noChangeAspect="1"/>
+          </p:cNvPicPr>
+          <p:nvPr/>
+        </p:nvPicPr>
+        <p:blipFill>
+          <a:blip r:embed="rId1"/>
+          <a:stretch>
+            <a:fillRect/>
+          </a:stretch>
+        </p:blipFill>
+        <p:spPr>
+          <a:xfrm>
+            <a:off x="7288911" y="1391031"/>
+            <a:ext cx="4258818" cy="4258818"/>
+          </a:xfrm>
+          <a:prstGeom prst="rect">
+            <a:avLst/>
+          </a:prstGeom>
+        </p:spPr>
+      </p:pic>
+      <p:sp>
+        <p:nvSpPr>
+          <p:cNvPr id="6" name="Shape 3"/>
           <p:cNvSpPr/>
           <p:nvPr/>
         </p:nvSpPr>
         <p:spPr>
           <a:xfrm>
-            <a:off x="7406640" y="1508760"/>
-            <a:ext cx="4023360" cy="4023360"/>
-          </a:xfrm>
-          <a:prstGeom prst="ellipse">
-            <a:avLst/>
-          </a:prstGeom>
-          <a:solidFill>
-            <a:srgbClr val="DCE3EF"/>
-          </a:solidFill>
-          <a:ln w="12700">
-            <a:solidFill>
-              <a:srgbClr val="DCE3EF"/>
-            </a:solidFill>
-            <a:prstDash val="solid"/>
-          </a:ln>
-        </p:spPr>
-      </p:sp>
-      <p:sp>
-        <p:nvSpPr>
-          <p:cNvPr id="6" name="Shape 4"/>
-          <p:cNvSpPr/>
-          <p:nvPr/>
-        </p:nvSpPr>
-        <p:spPr>
-          <a:xfrm>
-            <a:off x="7406640" y="1508760"/>
-            <a:ext cx="4023360" cy="4023360"/>
+            <a:off x="7159752" y="1261872"/>
+            <a:ext cx="4517136" cy="4517136"/>
           </a:xfrm>
           <a:prstGeom prst="ellipse">
             <a:avLst/>
@@ -3511,191 +3510,7 @@
       </p:sp>
       <p:sp>
         <p:nvSpPr>
-          <p:cNvPr id="7" name="Shape 5"/>
-          <p:cNvSpPr/>
-          <p:nvPr/>
-        </p:nvSpPr>
-        <p:spPr>
-          <a:xfrm>
-            <a:off x="8412480" y="1508760"/>
-            <a:ext cx="2011680" cy="4023360"/>
-          </a:xfrm>
-          <a:prstGeom prst="ellipse">
-            <a:avLst/>
-          </a:prstGeom>
-          <a:noFill/>
-          <a:ln w="12700">
-            <a:solidFill>
-              <a:srgbClr val="7F97C4"/>
-            </a:solidFill>
-            <a:prstDash val="solid"/>
-          </a:ln>
-        </p:spPr>
-      </p:sp>
-      <p:sp>
-        <p:nvSpPr>
-          <p:cNvPr id="8" name="Shape 6"/>
-          <p:cNvSpPr/>
-          <p:nvPr/>
-        </p:nvSpPr>
-        <p:spPr>
-          <a:xfrm>
-            <a:off x="7676154" y="1508760"/>
-            <a:ext cx="3484332" cy="4023360"/>
-          </a:xfrm>
-          <a:prstGeom prst="ellipse">
-            <a:avLst/>
-          </a:prstGeom>
-          <a:noFill/>
-          <a:ln w="12700">
-            <a:solidFill>
-              <a:srgbClr val="7F97C4"/>
-            </a:solidFill>
-            <a:prstDash val="solid"/>
-          </a:ln>
-        </p:spPr>
-      </p:sp>
-      <p:sp>
-        <p:nvSpPr>
-          <p:cNvPr id="9" name="Shape 7"/>
-          <p:cNvSpPr/>
-          <p:nvPr/>
-        </p:nvSpPr>
-        <p:spPr>
-          <a:xfrm>
-            <a:off x="9418320" y="1508760"/>
-            <a:ext cx="0" cy="4023360"/>
-          </a:xfrm>
-          <a:prstGeom prst="line">
-            <a:avLst/>
-          </a:prstGeom>
-          <a:noFill/>
-          <a:ln w="12700">
-            <a:solidFill>
-              <a:srgbClr val="7F97C4"/>
-            </a:solidFill>
-            <a:prstDash val="solid"/>
-          </a:ln>
-        </p:spPr>
-      </p:sp>
-      <p:sp>
-        <p:nvSpPr>
-          <p:cNvPr id="10" name="Shape 8"/>
-          <p:cNvSpPr/>
-          <p:nvPr/>
-        </p:nvSpPr>
-        <p:spPr>
-          <a:xfrm>
-            <a:off x="8412480" y="1778274"/>
-            <a:ext cx="2011680" cy="0"/>
-          </a:xfrm>
-          <a:prstGeom prst="line">
-            <a:avLst/>
-          </a:prstGeom>
-          <a:noFill/>
-          <a:ln w="12700">
-            <a:solidFill>
-              <a:srgbClr val="7F97C4"/>
-            </a:solidFill>
-            <a:prstDash val="solid"/>
-          </a:ln>
-        </p:spPr>
-      </p:sp>
-      <p:sp>
-        <p:nvSpPr>
-          <p:cNvPr id="11" name="Shape 9"/>
-          <p:cNvSpPr/>
-          <p:nvPr/>
-        </p:nvSpPr>
-        <p:spPr>
-          <a:xfrm>
-            <a:off x="7676154" y="2514600"/>
-            <a:ext cx="3484332" cy="0"/>
-          </a:xfrm>
-          <a:prstGeom prst="line">
-            <a:avLst/>
-          </a:prstGeom>
-          <a:noFill/>
-          <a:ln w="12700">
-            <a:solidFill>
-              <a:srgbClr val="7F97C4"/>
-            </a:solidFill>
-            <a:prstDash val="solid"/>
-          </a:ln>
-        </p:spPr>
-      </p:sp>
-      <p:sp>
-        <p:nvSpPr>
-          <p:cNvPr id="12" name="Shape 10"/>
-          <p:cNvSpPr/>
-          <p:nvPr/>
-        </p:nvSpPr>
-        <p:spPr>
-          <a:xfrm>
-            <a:off x="7406640" y="3520440"/>
-            <a:ext cx="4023360" cy="0"/>
-          </a:xfrm>
-          <a:prstGeom prst="line">
-            <a:avLst/>
-          </a:prstGeom>
-          <a:noFill/>
-          <a:ln w="12700">
-            <a:solidFill>
-              <a:srgbClr val="7F97C4"/>
-            </a:solidFill>
-            <a:prstDash val="solid"/>
-          </a:ln>
-        </p:spPr>
-      </p:sp>
-      <p:sp>
-        <p:nvSpPr>
-          <p:cNvPr id="13" name="Shape 11"/>
-          <p:cNvSpPr/>
-          <p:nvPr/>
-        </p:nvSpPr>
-        <p:spPr>
-          <a:xfrm>
-            <a:off x="7676154" y="4526280"/>
-            <a:ext cx="3484332" cy="0"/>
-          </a:xfrm>
-          <a:prstGeom prst="line">
-            <a:avLst/>
-          </a:prstGeom>
-          <a:noFill/>
-          <a:ln w="12700">
-            <a:solidFill>
-              <a:srgbClr val="7F97C4"/>
-            </a:solidFill>
-            <a:prstDash val="solid"/>
-          </a:ln>
-        </p:spPr>
-      </p:sp>
-      <p:sp>
-        <p:nvSpPr>
-          <p:cNvPr id="14" name="Shape 12"/>
-          <p:cNvSpPr/>
-          <p:nvPr/>
-        </p:nvSpPr>
-        <p:spPr>
-          <a:xfrm>
-            <a:off x="8412480" y="5262606"/>
-            <a:ext cx="2011680" cy="0"/>
-          </a:xfrm>
-          <a:prstGeom prst="line">
-            <a:avLst/>
-          </a:prstGeom>
-          <a:noFill/>
-          <a:ln w="12700">
-            <a:solidFill>
-              <a:srgbClr val="7F97C4"/>
-            </a:solidFill>
-            <a:prstDash val="solid"/>
-          </a:ln>
-        </p:spPr>
-      </p:sp>
-      <p:sp>
-        <p:nvSpPr>
-          <p:cNvPr id="15" name="Text 13"/>
+          <p:cNvPr id="7" name="Text 4"/>
           <p:cNvSpPr txBox="1"/>
           <p:nvPr/>
         </p:nvSpPr>
@@ -3734,7 +3549,7 @@
       </p:sp>
       <p:sp>
         <p:nvSpPr>
-          <p:cNvPr id="16" name="Text 14"/>
+          <p:cNvPr id="8" name="Text 5"/>
           <p:cNvSpPr txBox="1"/>
           <p:nvPr/>
         </p:nvSpPr>
@@ -3773,7 +3588,7 @@
       </p:sp>
       <p:sp>
         <p:nvSpPr>
-          <p:cNvPr id="17" name="Text 15"/>
+          <p:cNvPr id="9" name="Text 6"/>
           <p:cNvSpPr txBox="1"/>
           <p:nvPr/>
         </p:nvSpPr>
@@ -3812,7 +3627,7 @@
       </p:sp>
       <p:sp>
         <p:nvSpPr>
-          <p:cNvPr id="18" name="Text 16"/>
+          <p:cNvPr id="10" name="Text 7"/>
           <p:cNvSpPr txBox="1"/>
           <p:nvPr/>
         </p:nvSpPr>
@@ -3851,7 +3666,7 @@
       </p:sp>
       <p:sp>
         <p:nvSpPr>
-          <p:cNvPr id="19" name="Text 17"/>
+          <p:cNvPr id="11" name="Text 8"/>
           <p:cNvSpPr txBox="1"/>
           <p:nvPr/>
         </p:nvSpPr>
@@ -3890,7 +3705,7 @@
       </p:sp>
       <p:sp>
         <p:nvSpPr>
-          <p:cNvPr id="20" name="Text 18"/>
+          <p:cNvPr id="12" name="Text 9"/>
           <p:cNvSpPr txBox="1"/>
           <p:nvPr/>
         </p:nvSpPr>
@@ -3929,7 +3744,7 @@
       </p:sp>
       <p:sp>
         <p:nvSpPr>
-          <p:cNvPr id="21" name="Shape 19"/>
+          <p:cNvPr id="13" name="Shape 10"/>
           <p:cNvSpPr/>
           <p:nvPr/>
         </p:nvSpPr>
@@ -3961,7 +3776,7 @@
       </p:sp>
       <p:sp>
         <p:nvSpPr>
-          <p:cNvPr id="22" name="Text 20"/>
+          <p:cNvPr id="14" name="Text 11"/>
           <p:cNvSpPr txBox="1"/>
           <p:nvPr/>
         </p:nvSpPr>
@@ -6145,6 +5960,26 @@
                 <a:cs typeface="Calibri" pitchFamily="34" charset="-120"/>
               </a:rPr>
               <a:t>19. Ж.-Л. Давид. Смерть Сократа (1787), Метрополитен-музей</a:t>
+            </a:r>
+            <a:endParaRPr lang="en-US" sz="1400" dirty="0"/>
+          </a:p>
+          <a:p>
+            <a:pPr indent="0" marL="0">
+              <a:spcAft>
+                <a:spcPts val="600"/>
+              </a:spcAft>
+              <a:buNone/>
+            </a:pPr>
+            <a:r>
+              <a:rPr lang="en-US" sz="1400" dirty="0">
+                <a:solidFill>
+                  <a:srgbClr val="3B2A20"/>
+                </a:solidFill>
+                <a:latin typeface="Calibri" pitchFamily="34" charset="0"/>
+                <a:ea typeface="Calibri" pitchFamily="34" charset="-122"/>
+                <a:cs typeface="Calibri" pitchFamily="34" charset="-120"/>
+              </a:rPr>
+              <a:t>20. NASA. Blue Marble — снимки Земли (слайд 11)</a:t>
             </a:r>
             <a:endParaRPr lang="en-US" sz="1400" dirty="0"/>
           </a:p>
